--- a/slides/14-wrap-up.pptx
+++ b/slides/14-wrap-up.pptx
@@ -200,7 +200,7 @@
           <a:p>
             <a:fld id="{3CBB8A52-8AC5-C74C-97FB-632C448F3674}" type="datetimeFigureOut">
               <a:rPr lang="en-US" smtClean="0"/>
-              <a:t>12/10/25</a:t>
+              <a:t>12/11/25</a:t>
             </a:fld>
             <a:endParaRPr lang="en-US"/>
           </a:p>
@@ -706,7 +706,7 @@
             <a:fld id="{5586B75A-687E-405C-8A0B-8D00578BA2C3}" type="datetimeFigureOut">
               <a:rPr lang="en-US" smtClean="0"/>
               <a:pPr/>
-              <a:t>12/10/25</a:t>
+              <a:t>12/11/25</a:t>
             </a:fld>
             <a:endParaRPr lang="en-US" dirty="0"/>
           </a:p>
@@ -878,7 +878,7 @@
             <a:fld id="{5586B75A-687E-405C-8A0B-8D00578BA2C3}" type="datetimeFigureOut">
               <a:rPr lang="en-US" smtClean="0"/>
               <a:pPr/>
-              <a:t>12/10/25</a:t>
+              <a:t>12/11/25</a:t>
             </a:fld>
             <a:endParaRPr lang="en-US" dirty="0"/>
           </a:p>
@@ -1060,7 +1060,7 @@
             <a:fld id="{5586B75A-687E-405C-8A0B-8D00578BA2C3}" type="datetimeFigureOut">
               <a:rPr lang="en-US" smtClean="0"/>
               <a:pPr/>
-              <a:t>12/10/25</a:t>
+              <a:t>12/11/25</a:t>
             </a:fld>
             <a:endParaRPr lang="en-US" dirty="0"/>
           </a:p>
@@ -1232,7 +1232,7 @@
             <a:fld id="{5586B75A-687E-405C-8A0B-8D00578BA2C3}" type="datetimeFigureOut">
               <a:rPr lang="en-US" smtClean="0"/>
               <a:pPr/>
-              <a:t>12/10/25</a:t>
+              <a:t>12/11/25</a:t>
             </a:fld>
             <a:endParaRPr lang="en-US" dirty="0"/>
           </a:p>
@@ -1488,7 +1488,7 @@
             <a:fld id="{5586B75A-687E-405C-8A0B-8D00578BA2C3}" type="datetimeFigureOut">
               <a:rPr lang="en-US" smtClean="0"/>
               <a:pPr/>
-              <a:t>12/10/25</a:t>
+              <a:t>12/11/25</a:t>
             </a:fld>
             <a:endParaRPr lang="en-US" dirty="0"/>
           </a:p>
@@ -1778,7 +1778,7 @@
             <a:fld id="{5586B75A-687E-405C-8A0B-8D00578BA2C3}" type="datetimeFigureOut">
               <a:rPr lang="en-US" smtClean="0"/>
               <a:pPr/>
-              <a:t>12/10/25</a:t>
+              <a:t>12/11/25</a:t>
             </a:fld>
             <a:endParaRPr lang="en-US" dirty="0"/>
           </a:p>
@@ -2222,7 +2222,7 @@
             <a:fld id="{5586B75A-687E-405C-8A0B-8D00578BA2C3}" type="datetimeFigureOut">
               <a:rPr lang="en-US" smtClean="0"/>
               <a:pPr/>
-              <a:t>12/10/25</a:t>
+              <a:t>12/11/25</a:t>
             </a:fld>
             <a:endParaRPr lang="en-US" dirty="0"/>
           </a:p>
@@ -2342,7 +2342,7 @@
             <a:fld id="{5586B75A-687E-405C-8A0B-8D00578BA2C3}" type="datetimeFigureOut">
               <a:rPr lang="en-US" smtClean="0"/>
               <a:pPr/>
-              <a:t>12/10/25</a:t>
+              <a:t>12/11/25</a:t>
             </a:fld>
             <a:endParaRPr lang="en-US" dirty="0"/>
           </a:p>
@@ -2439,7 +2439,7 @@
             <a:fld id="{5586B75A-687E-405C-8A0B-8D00578BA2C3}" type="datetimeFigureOut">
               <a:rPr lang="en-US" smtClean="0"/>
               <a:pPr/>
-              <a:t>12/10/25</a:t>
+              <a:t>12/11/25</a:t>
             </a:fld>
             <a:endParaRPr lang="en-US" dirty="0"/>
           </a:p>
@@ -2729,7 +2729,7 @@
             <a:fld id="{5586B75A-687E-405C-8A0B-8D00578BA2C3}" type="datetimeFigureOut">
               <a:rPr lang="en-US" smtClean="0"/>
               <a:pPr/>
-              <a:t>12/10/25</a:t>
+              <a:t>12/11/25</a:t>
             </a:fld>
             <a:endParaRPr lang="en-US" dirty="0"/>
           </a:p>
@@ -3004,7 +3004,7 @@
             <a:fld id="{5586B75A-687E-405C-8A0B-8D00578BA2C3}" type="datetimeFigureOut">
               <a:rPr lang="en-US" smtClean="0"/>
               <a:pPr/>
-              <a:t>12/10/25</a:t>
+              <a:t>12/11/25</a:t>
             </a:fld>
             <a:endParaRPr lang="en-US" dirty="0"/>
           </a:p>
@@ -3317,7 +3317,7 @@
             <a:fld id="{5586B75A-687E-405C-8A0B-8D00578BA2C3}" type="datetimeFigureOut">
               <a:rPr lang="en-US" smtClean="0"/>
               <a:pPr/>
-              <a:t>12/10/25</a:t>
+              <a:t>12/11/25</a:t>
             </a:fld>
             <a:endParaRPr lang="en-US" dirty="0"/>
           </a:p>
@@ -3968,7 +3968,7 @@
                 <a:cs typeface="Arial"/>
                 <a:sym typeface="Arial"/>
               </a:rPr>
-              <a:t>(20 mins) Half of each group, move around the room and interact with other groups’ projects. Give constructive feedback! The other half of each group stays with the project to demo it.</a:t>
+              <a:t>(15 mins) Half of each group, move around the room and interact with other groups’ projects. Give constructive feedback! The other half of each group stays with the project to demo it.</a:t>
             </a:r>
           </a:p>
           <a:p>
@@ -4002,12 +4002,20 @@
               <a:buAutoNum type="arabicPeriod"/>
             </a:pPr>
             <a:r>
+              <a:rPr lang="en-US" sz="2400">
+                <a:ea typeface="Arial"/>
+                <a:cs typeface="Arial"/>
+                <a:sym typeface="Arial"/>
+              </a:rPr>
+              <a:t>(15 </a:t>
+            </a:r>
+            <a:r>
               <a:rPr lang="en-US" sz="2400" dirty="0">
                 <a:ea typeface="Arial"/>
                 <a:cs typeface="Arial"/>
                 <a:sym typeface="Arial"/>
               </a:rPr>
-              <a:t>(20 mins) Switch who is moving around and who is demo-</a:t>
+              <a:t>mins) Switch who is moving around and who is demo-</a:t>
             </a:r>
             <a:r>
               <a:rPr lang="en-US" sz="2400" dirty="0" err="1">
@@ -4062,23 +4070,7 @@
                 <a:cs typeface="Arial"/>
                 <a:sym typeface="Arial"/>
               </a:rPr>
-              <a:t>Return </a:t>
-            </a:r>
-            <a:r>
-              <a:rPr lang="en-US" sz="2400">
-                <a:ea typeface="Arial"/>
-                <a:cs typeface="Arial"/>
-                <a:sym typeface="Arial"/>
-              </a:rPr>
-              <a:t>to seats &amp; wrap </a:t>
-            </a:r>
-            <a:r>
-              <a:rPr lang="en-US" sz="2400" dirty="0">
-                <a:ea typeface="Arial"/>
-                <a:cs typeface="Arial"/>
-                <a:sym typeface="Arial"/>
-              </a:rPr>
-              <a:t>up the semester</a:t>
+              <a:t>(30 mins) Return to seats &amp; wrap up the semester</a:t>
             </a:r>
           </a:p>
           <a:p>
